--- a/apps/resources/bundled_files/3-klass-bolchok-tushunugu-oyun-1234.pptx
+++ b/apps/resources/bundled_files/3-klass-bolchok-tushunugu-oyun-1234.pptx
@@ -3781,7 +3781,7 @@
                 </a:solidFill>
                 <a:latin typeface="PT Sans"/>
               </a:rPr>
-              <a:t>3-класс ›</a:t>
+              <a:t/>
             </a:r>
           </a:p>
           <a:p>
@@ -4689,7 +4689,7 @@
                 </a:solidFill>
                 <a:latin typeface="PT Sans"/>
               </a:rPr>
-              <a:t>3-класс ›</a:t>
+              <a:t/>
             </a:r>
           </a:p>
           <a:p>
@@ -7235,7 +7235,7 @@
                 </a:solidFill>
                 <a:latin typeface="PT Sans"/>
               </a:rPr>
-              <a:t>3-класс ›</a:t>
+              <a:t/>
             </a:r>
           </a:p>
           <a:p>
@@ -10009,7 +10009,7 @@
                 </a:solidFill>
                 <a:latin typeface="PT Sans"/>
               </a:rPr>
-              <a:t>3-класс ›</a:t>
+              <a:t/>
             </a:r>
           </a:p>
           <a:p>
@@ -10951,7 +10951,7 @@
                 </a:solidFill>
                 <a:latin typeface="PT Sans"/>
               </a:rPr>
-              <a:t>3-класс ›</a:t>
+              <a:t/>
             </a:r>
           </a:p>
           <a:p>
@@ -12121,7 +12121,7 @@
                 </a:solidFill>
                 <a:latin typeface="PT Sans"/>
               </a:rPr>
-              <a:t>3-класс ›</a:t>
+              <a:t/>
             </a:r>
           </a:p>
           <a:p>
@@ -13063,7 +13063,7 @@
                 </a:solidFill>
                 <a:latin typeface="PT Sans"/>
               </a:rPr>
-              <a:t>3-класс ›</a:t>
+              <a:t/>
             </a:r>
           </a:p>
           <a:p>
@@ -14233,7 +14233,7 @@
                 </a:solidFill>
                 <a:latin typeface="PT Sans"/>
               </a:rPr>
-              <a:t>3-класс ›</a:t>
+              <a:t/>
             </a:r>
           </a:p>
           <a:p>
@@ -16114,7 +16114,7 @@
                 </a:solidFill>
                 <a:latin typeface="PT Sans"/>
               </a:rPr>
-              <a:t>3-класс ›</a:t>
+              <a:t/>
             </a:r>
           </a:p>
           <a:p>

--- a/apps/resources/bundled_files/3-klass-bolchok-tushunugu-oyun-1234.pptx
+++ b/apps/resources/bundled_files/3-klass-bolchok-tushunugu-oyun-1234.pptx
@@ -15686,7 +15686,7 @@
                 </a:solidFill>
                 <a:latin typeface="PT Sans"/>
               </a:rPr>
-              <a:t>Нан 4 бирдей бөлүк, 3ү жейилди. Калганы?</a:t>
+              <a:t>Нан 4 бирдей бөлүк, 3ү желди. Калганы?</a:t>
             </a:r>
           </a:p>
         </p:txBody>
@@ -17681,7 +17681,7 @@
                 </a:solidFill>
                 <a:latin typeface="PT Sans"/>
               </a:rPr>
-              <a:t>Нан 4 бирдей бөлүк, 3ү жейилди. Калганы?</a:t>
+              <a:t>Нан 4 бирдей бөлүк, 3ү желди. Калганы?</a:t>
             </a:r>
           </a:p>
         </p:txBody>
